--- a/Tp2/Ejercicio2_PuntoFijo.pptx
+++ b/Tp2/Ejercicio2_PuntoFijo.pptx
@@ -5,15 +5,13 @@
     <p:sldMasterId id="2147483648" r:id="rId1"/>
   </p:sldMasterIdLst>
   <p:notesMasterIdLst>
-    <p:notesMasterId r:id="rId8"/>
+    <p:notesMasterId r:id="rId6"/>
   </p:notesMasterIdLst>
   <p:sldIdLst>
     <p:sldId id="256" r:id="rId2"/>
     <p:sldId id="257" r:id="rId3"/>
-    <p:sldId id="258" r:id="rId4"/>
-    <p:sldId id="259" r:id="rId5"/>
-    <p:sldId id="260" r:id="rId6"/>
-    <p:sldId id="262" r:id="rId7"/>
+    <p:sldId id="259" r:id="rId4"/>
+    <p:sldId id="260" r:id="rId5"/>
   </p:sldIdLst>
   <p:sldSz cx="9144000" cy="5143500" type="screen16x9"/>
   <p:notesSz cx="5143500" cy="9144000"/>
@@ -578,174 +576,6 @@
 </p:notes>
 </file>
 
-<file path=ppt/notesSlides/notesSlide5.xml><?xml version="1.0" encoding="utf-8"?>
-<p:notes xmlns:a="http://schemas.openxmlformats.org/drawingml/2006/main" xmlns:r="http://schemas.openxmlformats.org/officeDocument/2006/relationships" xmlns:p="http://schemas.openxmlformats.org/presentationml/2006/main">
-  <p:cSld>
-    <p:spTree>
-      <p:nvGrpSpPr>
-        <p:cNvPr id="1" name=""/>
-        <p:cNvGrpSpPr/>
-        <p:nvPr/>
-      </p:nvGrpSpPr>
-      <p:grpSpPr>
-        <a:xfrm>
-          <a:off x="0" y="0"/>
-          <a:ext cx="0" cy="0"/>
-          <a:chOff x="0" y="0"/>
-          <a:chExt cx="0" cy="0"/>
-        </a:xfrm>
-      </p:grpSpPr>
-      <p:sp>
-        <p:nvSpPr>
-          <p:cNvPr id="2" name="Slide Image Placeholder 1"/>
-          <p:cNvSpPr>
-            <a:spLocks noGrp="1" noRot="1" noChangeAspect="1"/>
-          </p:cNvSpPr>
-          <p:nvPr>
-            <p:ph type="sldImg"/>
-          </p:nvPr>
-        </p:nvSpPr>
-        <p:spPr/>
-      </p:sp>
-      <p:sp>
-        <p:nvSpPr>
-          <p:cNvPr id="3" name="Notes Placeholder 2"/>
-          <p:cNvSpPr>
-            <a:spLocks noGrp="1"/>
-          </p:cNvSpPr>
-          <p:nvPr>
-            <p:ph type="body" idx="1"/>
-          </p:nvPr>
-        </p:nvSpPr>
-        <p:spPr/>
-        <p:txBody>
-          <a:bodyPr/>
-          <a:lstStyle/>
-          <a:p>
-            <a:endParaRPr lang="en-US" dirty="0"/>
-          </a:p>
-        </p:txBody>
-      </p:sp>
-      <p:sp>
-        <p:nvSpPr>
-          <p:cNvPr id="4" name="Slide Number Placeholder 3"/>
-          <p:cNvSpPr>
-            <a:spLocks noGrp="1"/>
-          </p:cNvSpPr>
-          <p:nvPr>
-            <p:ph type="sldNum" sz="quarter" idx="10"/>
-          </p:nvPr>
-        </p:nvSpPr>
-        <p:spPr/>
-        <p:txBody>
-          <a:bodyPr/>
-          <a:lstStyle/>
-          <a:p>
-            <a:fld id="{F7021451-1387-4CA6-816F-3879F97B5CBC}" type="slidenum">
-              <a:rPr lang="en-US"/>
-              <a:t>5</a:t>
-            </a:fld>
-            <a:endParaRPr lang="en-US"/>
-          </a:p>
-        </p:txBody>
-      </p:sp>
-    </p:spTree>
-    <p:extLst>
-      <p:ext uri="{BB962C8B-B14F-4D97-AF65-F5344CB8AC3E}">
-        <p14:creationId xmlns:p14="http://schemas.microsoft.com/office/powerpoint/2010/main" val="1024086991"/>
-      </p:ext>
-    </p:extLst>
-  </p:cSld>
-  <p:clrMapOvr>
-    <a:masterClrMapping/>
-  </p:clrMapOvr>
-</p:notes>
-</file>
-
-<file path=ppt/notesSlides/notesSlide6.xml><?xml version="1.0" encoding="utf-8"?>
-<p:notes xmlns:a="http://schemas.openxmlformats.org/drawingml/2006/main" xmlns:r="http://schemas.openxmlformats.org/officeDocument/2006/relationships" xmlns:p="http://schemas.openxmlformats.org/presentationml/2006/main">
-  <p:cSld>
-    <p:spTree>
-      <p:nvGrpSpPr>
-        <p:cNvPr id="1" name=""/>
-        <p:cNvGrpSpPr/>
-        <p:nvPr/>
-      </p:nvGrpSpPr>
-      <p:grpSpPr>
-        <a:xfrm>
-          <a:off x="0" y="0"/>
-          <a:ext cx="0" cy="0"/>
-          <a:chOff x="0" y="0"/>
-          <a:chExt cx="0" cy="0"/>
-        </a:xfrm>
-      </p:grpSpPr>
-      <p:sp>
-        <p:nvSpPr>
-          <p:cNvPr id="2" name="Slide Image Placeholder 1"/>
-          <p:cNvSpPr>
-            <a:spLocks noGrp="1" noRot="1" noChangeAspect="1"/>
-          </p:cNvSpPr>
-          <p:nvPr>
-            <p:ph type="sldImg"/>
-          </p:nvPr>
-        </p:nvSpPr>
-        <p:spPr/>
-      </p:sp>
-      <p:sp>
-        <p:nvSpPr>
-          <p:cNvPr id="3" name="Notes Placeholder 2"/>
-          <p:cNvSpPr>
-            <a:spLocks noGrp="1"/>
-          </p:cNvSpPr>
-          <p:nvPr>
-            <p:ph type="body" idx="1"/>
-          </p:nvPr>
-        </p:nvSpPr>
-        <p:spPr/>
-        <p:txBody>
-          <a:bodyPr/>
-          <a:lstStyle/>
-          <a:p>
-            <a:endParaRPr lang="en-US" dirty="0"/>
-          </a:p>
-        </p:txBody>
-      </p:sp>
-      <p:sp>
-        <p:nvSpPr>
-          <p:cNvPr id="4" name="Slide Number Placeholder 3"/>
-          <p:cNvSpPr>
-            <a:spLocks noGrp="1"/>
-          </p:cNvSpPr>
-          <p:nvPr>
-            <p:ph type="sldNum" sz="quarter" idx="10"/>
-          </p:nvPr>
-        </p:nvSpPr>
-        <p:spPr/>
-        <p:txBody>
-          <a:bodyPr/>
-          <a:lstStyle/>
-          <a:p>
-            <a:fld id="{F7021451-1387-4CA6-816F-3879F97B5CBC}" type="slidenum">
-              <a:rPr lang="en-US"/>
-              <a:t>6</a:t>
-            </a:fld>
-            <a:endParaRPr lang="en-US"/>
-          </a:p>
-        </p:txBody>
-      </p:sp>
-    </p:spTree>
-    <p:extLst>
-      <p:ext uri="{BB962C8B-B14F-4D97-AF65-F5344CB8AC3E}">
-        <p14:creationId xmlns:p14="http://schemas.microsoft.com/office/powerpoint/2010/main" val="1024086991"/>
-      </p:ext>
-    </p:extLst>
-  </p:cSld>
-  <p:clrMapOvr>
-    <a:masterClrMapping/>
-  </p:clrMapOvr>
-</p:notes>
-</file>
-
 <file path=ppt/slideLayouts/slideLayout1.xml><?xml version="1.0" encoding="utf-8"?>
 <p:sldLayout xmlns:a="http://schemas.openxmlformats.org/drawingml/2006/main" xmlns:r="http://schemas.openxmlformats.org/officeDocument/2006/relationships" xmlns:p="http://schemas.openxmlformats.org/presentationml/2006/main" preserve="1">
   <p:cSld name="DEFAULT">
@@ -1249,17 +1079,6 @@
             <a:pPr marL="0" indent="0" algn="l">
               <a:buNone/>
             </a:pPr>
-            <a:r>
-              <a:rPr lang="en-US" sz="1200" dirty="0">
-                <a:solidFill>
-                  <a:srgbClr val="4A6A80"/>
-                </a:solidFill>
-                <a:latin typeface="Calibri" pitchFamily="34" charset="0"/>
-                <a:ea typeface="Calibri" pitchFamily="34" charset="-122"/>
-                <a:cs typeface="Calibri" pitchFamily="34" charset="-120"/>
-              </a:rPr>
-              <a:t>Sistemas de Procesamiento Digital de Señales</a:t>
-            </a:r>
             <a:endParaRPr lang="en-US" sz="1200" dirty="0"/>
           </a:p>
         </p:txBody>
@@ -1927,1086 +1746,6 @@
 
 <file path=ppt/slides/slide3.xml><?xml version="1.0" encoding="utf-8"?>
 <p:sld xmlns:a="http://schemas.openxmlformats.org/drawingml/2006/main" xmlns:r="http://schemas.openxmlformats.org/officeDocument/2006/relationships" xmlns:p="http://schemas.openxmlformats.org/presentationml/2006/main">
-  <p:cSld name="Slide 3">
-    <p:bg>
-      <p:bgPr>
-        <a:solidFill>
-          <a:srgbClr val="F4F6FA"/>
-        </a:solidFill>
-        <a:effectLst/>
-      </p:bgPr>
-    </p:bg>
-    <p:spTree>
-      <p:nvGrpSpPr>
-        <p:cNvPr id="1" name=""/>
-        <p:cNvGrpSpPr/>
-        <p:nvPr/>
-      </p:nvGrpSpPr>
-      <p:grpSpPr>
-        <a:xfrm>
-          <a:off x="0" y="0"/>
-          <a:ext cx="0" cy="0"/>
-          <a:chOff x="0" y="0"/>
-          <a:chExt cx="0" cy="0"/>
-        </a:xfrm>
-      </p:grpSpPr>
-      <p:sp>
-        <p:nvSpPr>
-          <p:cNvPr id="2" name="Shape 0"/>
-          <p:cNvSpPr/>
-          <p:nvPr/>
-        </p:nvSpPr>
-        <p:spPr>
-          <a:xfrm>
-            <a:off x="0" y="0"/>
-            <a:ext cx="9144000" cy="685800"/>
-          </a:xfrm>
-          <a:prstGeom prst="rect">
-            <a:avLst/>
-          </a:prstGeom>
-          <a:solidFill>
-            <a:srgbClr val="0077B6"/>
-          </a:solidFill>
-          <a:ln w="12700">
-            <a:solidFill>
-              <a:srgbClr val="0077B6"/>
-            </a:solidFill>
-            <a:prstDash val="solid"/>
-          </a:ln>
-        </p:spPr>
-      </p:sp>
-      <p:sp>
-        <p:nvSpPr>
-          <p:cNvPr id="3" name="Text 1"/>
-          <p:cNvSpPr/>
-          <p:nvPr/>
-        </p:nvSpPr>
-        <p:spPr>
-          <a:xfrm>
-            <a:off x="365760" y="0"/>
-            <a:ext cx="8412480" cy="685800"/>
-          </a:xfrm>
-          <a:prstGeom prst="rect">
-            <a:avLst/>
-          </a:prstGeom>
-          <a:noFill/>
-          <a:ln/>
-        </p:spPr>
-        <p:txBody>
-          <a:bodyPr wrap="square" rtlCol="0" anchor="ctr"/>
-          <a:lstStyle/>
-          <a:p>
-            <a:pPr marL="0" indent="0">
-              <a:buNone/>
-            </a:pPr>
-            <a:r>
-              <a:rPr lang="en-US" sz="2200" b="1" dirty="0">
-                <a:solidFill>
-                  <a:srgbClr val="FFFFFF"/>
-                </a:solidFill>
-                <a:latin typeface="Calibri" pitchFamily="34" charset="0"/>
-                <a:ea typeface="Calibri" pitchFamily="34" charset="-122"/>
-                <a:cs typeface="Calibri" pitchFamily="34" charset="-120"/>
-              </a:rPr>
-              <a:t>¿Qué es el formato Q?</a:t>
-            </a:r>
-            <a:endParaRPr lang="en-US" sz="2200" dirty="0"/>
-          </a:p>
-        </p:txBody>
-      </p:sp>
-      <p:sp>
-        <p:nvSpPr>
-          <p:cNvPr id="4" name="Text 2"/>
-          <p:cNvSpPr/>
-          <p:nvPr/>
-        </p:nvSpPr>
-        <p:spPr>
-          <a:xfrm>
-            <a:off x="365760" y="822960"/>
-            <a:ext cx="4114800" cy="365760"/>
-          </a:xfrm>
-          <a:prstGeom prst="rect">
-            <a:avLst/>
-          </a:prstGeom>
-          <a:noFill/>
-          <a:ln/>
-        </p:spPr>
-        <p:txBody>
-          <a:bodyPr wrap="square" rtlCol="0" anchor="ctr"/>
-          <a:lstStyle/>
-          <a:p>
-            <a:pPr marL="0" indent="0">
-              <a:buNone/>
-            </a:pPr>
-            <a:r>
-              <a:rPr lang="en-US" sz="1600" b="1" dirty="0">
-                <a:solidFill>
-                  <a:srgbClr val="0077B6"/>
-                </a:solidFill>
-                <a:latin typeface="Calibri" pitchFamily="34" charset="0"/>
-                <a:ea typeface="Calibri" pitchFamily="34" charset="-122"/>
-                <a:cs typeface="Calibri" pitchFamily="34" charset="-120"/>
-              </a:rPr>
-              <a:t>Formato Qm.n</a:t>
-            </a:r>
-            <a:endParaRPr lang="en-US" sz="1600" dirty="0"/>
-          </a:p>
-        </p:txBody>
-      </p:sp>
-      <p:sp>
-        <p:nvSpPr>
-          <p:cNvPr id="5" name="Text 3"/>
-          <p:cNvSpPr/>
-          <p:nvPr/>
-        </p:nvSpPr>
-        <p:spPr>
-          <a:xfrm>
-            <a:off x="365760" y="1234440"/>
-            <a:ext cx="4114800" cy="2194560"/>
-          </a:xfrm>
-          <a:prstGeom prst="rect">
-            <a:avLst/>
-          </a:prstGeom>
-          <a:noFill/>
-          <a:ln/>
-        </p:spPr>
-        <p:txBody>
-          <a:bodyPr wrap="square" rtlCol="0" anchor="ctr"/>
-          <a:lstStyle/>
-          <a:p>
-            <a:pPr marL="0" indent="0">
-              <a:lnSpc>
-                <a:spcPct val="130000"/>
-              </a:lnSpc>
-              <a:buNone/>
-            </a:pPr>
-            <a:r>
-              <a:rPr lang="en-US" sz="1300" b="1" dirty="0">
-                <a:solidFill>
-                  <a:srgbClr val="00B4D8"/>
-                </a:solidFill>
-                <a:latin typeface="Calibri" pitchFamily="34" charset="0"/>
-                <a:ea typeface="Calibri" pitchFamily="34" charset="-122"/>
-                <a:cs typeface="Calibri" pitchFamily="34" charset="-120"/>
-              </a:rPr>
-              <a:t>m</a:t>
-            </a:r>
-            <a:r>
-              <a:rPr lang="en-US" sz="1300" dirty="0">
-                <a:solidFill>
-                  <a:srgbClr val="0D1B2A"/>
-                </a:solidFill>
-                <a:latin typeface="Calibri" pitchFamily="34" charset="0"/>
-                <a:ea typeface="Calibri" pitchFamily="34" charset="-122"/>
-                <a:cs typeface="Calibri" pitchFamily="34" charset="-120"/>
-              </a:rPr>
-              <a:t> = bits para la parte entera
-</a:t>
-            </a:r>
-            <a:r>
-              <a:rPr lang="en-US" sz="1300" b="1" dirty="0">
-                <a:solidFill>
-                  <a:srgbClr val="00B4D8"/>
-                </a:solidFill>
-                <a:latin typeface="Calibri" pitchFamily="34" charset="0"/>
-                <a:ea typeface="Calibri" pitchFamily="34" charset="-122"/>
-                <a:cs typeface="Calibri" pitchFamily="34" charset="-120"/>
-              </a:rPr>
-              <a:t>n</a:t>
-            </a:r>
-            <a:r>
-              <a:rPr lang="en-US" sz="1300" dirty="0">
-                <a:solidFill>
-                  <a:srgbClr val="0D1B2A"/>
-                </a:solidFill>
-                <a:latin typeface="Calibri" pitchFamily="34" charset="0"/>
-                <a:ea typeface="Calibri" pitchFamily="34" charset="-122"/>
-                <a:cs typeface="Calibri" pitchFamily="34" charset="-120"/>
-              </a:rPr>
-              <a:t> = bits para la parte fraccionaria
-</a:t>
-            </a:r>
-            <a:r>
-              <a:rPr lang="en-US" sz="1300" b="1" dirty="0">
-                <a:solidFill>
-                  <a:srgbClr val="0D1B2A"/>
-                </a:solidFill>
-                <a:latin typeface="Calibri" pitchFamily="34" charset="0"/>
-                <a:ea typeface="Calibri" pitchFamily="34" charset="-122"/>
-                <a:cs typeface="Calibri" pitchFamily="34" charset="-120"/>
-              </a:rPr>
-              <a:t>Total: </a:t>
-            </a:r>
-            <a:r>
-              <a:rPr lang="en-US" sz="1300" dirty="0">
-                <a:solidFill>
-                  <a:srgbClr val="0D1B2A"/>
-                </a:solidFill>
-                <a:latin typeface="Calibri" pitchFamily="34" charset="0"/>
-                <a:ea typeface="Calibri" pitchFamily="34" charset="-122"/>
-                <a:cs typeface="Calibri" pitchFamily="34" charset="-120"/>
-              </a:rPr>
-              <a:t>32 bits (int32_t)
-</a:t>
-            </a:r>
-            <a:r>
-              <a:rPr lang="en-US" sz="1300" b="1" dirty="0">
-                <a:solidFill>
-                  <a:srgbClr val="0D1B2A"/>
-                </a:solidFill>
-                <a:latin typeface="Calibri" pitchFamily="34" charset="0"/>
-                <a:ea typeface="Calibri" pitchFamily="34" charset="-122"/>
-                <a:cs typeface="Calibri" pitchFamily="34" charset="-120"/>
-              </a:rPr>
-              <a:t>Factor de escala: </a:t>
-            </a:r>
-            <a:r>
-              <a:rPr lang="en-US" sz="1300" dirty="0">
-                <a:solidFill>
-                  <a:srgbClr val="0D1B2A"/>
-                </a:solidFill>
-                <a:latin typeface="Calibri" pitchFamily="34" charset="0"/>
-                <a:ea typeface="Calibri" pitchFamily="34" charset="-122"/>
-                <a:cs typeface="Calibri" pitchFamily="34" charset="-120"/>
-              </a:rPr>
-              <a:t>2^n</a:t>
-            </a:r>
-            <a:endParaRPr lang="en-US" sz="1300" dirty="0"/>
-          </a:p>
-        </p:txBody>
-      </p:sp>
-      <p:sp>
-        <p:nvSpPr>
-          <p:cNvPr id="6" name="Text 4"/>
-          <p:cNvSpPr/>
-          <p:nvPr/>
-        </p:nvSpPr>
-        <p:spPr>
-          <a:xfrm>
-            <a:off x="4846320" y="822960"/>
-            <a:ext cx="3931920" cy="365760"/>
-          </a:xfrm>
-          <a:prstGeom prst="rect">
-            <a:avLst/>
-          </a:prstGeom>
-          <a:noFill/>
-          <a:ln/>
-        </p:spPr>
-        <p:txBody>
-          <a:bodyPr wrap="square" rtlCol="0" anchor="ctr"/>
-          <a:lstStyle/>
-          <a:p>
-            <a:pPr marL="0" indent="0">
-              <a:buNone/>
-            </a:pPr>
-            <a:r>
-              <a:rPr lang="en-US" sz="1400" b="1" dirty="0">
-                <a:solidFill>
-                  <a:srgbClr val="0077B6"/>
-                </a:solidFill>
-                <a:latin typeface="Calibri" pitchFamily="34" charset="0"/>
-                <a:ea typeface="Calibri" pitchFamily="34" charset="-122"/>
-                <a:cs typeface="Calibri" pitchFamily="34" charset="-120"/>
-              </a:rPr>
-              <a:t>Comparación de formatos</a:t>
-            </a:r>
-            <a:endParaRPr lang="en-US" sz="1400" dirty="0"/>
-          </a:p>
-        </p:txBody>
-      </p:sp>
-      <p:graphicFrame>
-        <p:nvGraphicFramePr>
-          <p:cNvPr id="7" name="Table 0"/>
-          <p:cNvGraphicFramePr>
-            <a:graphicFrameLocks noGrp="1"/>
-          </p:cNvGraphicFramePr>
-          <p:nvPr>
-            <p:extLst>
-              <p:ext uri="{D42A27DB-BD31-4B8C-83A1-F6EECF244321}">
-                <p14:modId xmlns:p14="http://schemas.microsoft.com/office/powerpoint/2010/main" val="1579011935"/>
-              </p:ext>
-            </p:extLst>
-          </p:nvPr>
-        </p:nvGraphicFramePr>
-        <p:xfrm>
-          <a:off x="4846320" y="1234440"/>
-          <a:ext cx="3931920" cy="1234440"/>
-        </p:xfrm>
-        <a:graphic>
-          <a:graphicData uri="http://schemas.openxmlformats.org/drawingml/2006/table">
-            <a:tbl>
-              <a:tblPr/>
-              <a:tblGrid>
-                <a:gridCol w="1188720">
-                  <a:extLst>
-                    <a:ext uri="{9D8B030D-6E8A-4147-A177-3AD203B41FA5}">
-                      <a16:colId xmlns:a16="http://schemas.microsoft.com/office/drawing/2014/main" val="20000"/>
-                    </a:ext>
-                  </a:extLst>
-                </a:gridCol>
-                <a:gridCol w="1463040">
-                  <a:extLst>
-                    <a:ext uri="{9D8B030D-6E8A-4147-A177-3AD203B41FA5}">
-                      <a16:colId xmlns:a16="http://schemas.microsoft.com/office/drawing/2014/main" val="20001"/>
-                    </a:ext>
-                  </a:extLst>
-                </a:gridCol>
-                <a:gridCol w="1280160">
-                  <a:extLst>
-                    <a:ext uri="{9D8B030D-6E8A-4147-A177-3AD203B41FA5}">
-                      <a16:colId xmlns:a16="http://schemas.microsoft.com/office/drawing/2014/main" val="20002"/>
-                    </a:ext>
-                  </a:extLst>
-                </a:gridCol>
-              </a:tblGrid>
-              <a:tr h="411480">
-                <a:tc>
-                  <a:txBody>
-                    <a:bodyPr/>
-                    <a:lstStyle/>
-                    <a:p>
-                      <a:pPr marL="0" indent="0">
-                        <a:buNone/>
-                      </a:pPr>
-                      <a:r>
-                        <a:rPr lang="en-US" sz="1200" b="1" dirty="0">
-                          <a:solidFill>
-                            <a:srgbClr val="FFFFFF"/>
-                          </a:solidFill>
-                          <a:latin typeface="Calibri" pitchFamily="34" charset="0"/>
-                          <a:ea typeface="Calibri" pitchFamily="34" charset="-122"/>
-                          <a:cs typeface="Calibri" pitchFamily="34" charset="-120"/>
-                        </a:rPr>
-                        <a:t>Formato</a:t>
-                      </a:r>
-                      <a:endParaRPr lang="en-US" sz="1200" dirty="0">
-                        <a:latin typeface="Calibri" charset="0"/>
-                        <a:ea typeface="Calibri" charset="0"/>
-                        <a:cs typeface="Calibri" charset="0"/>
-                      </a:endParaRPr>
-                    </a:p>
-                  </a:txBody>
-                  <a:tcPr>
-                    <a:lnL w="12700" cap="flat" cmpd="sng" algn="ctr">
-                      <a:solidFill>
-                        <a:srgbClr val="C0CCDA"/>
-                      </a:solidFill>
-                      <a:prstDash val="solid"/>
-                      <a:round/>
-                      <a:headEnd type="none" w="med" len="med"/>
-                      <a:tailEnd type="none" w="med" len="med"/>
-                    </a:lnL>
-                    <a:lnR w="12700" cap="flat" cmpd="sng" algn="ctr">
-                      <a:solidFill>
-                        <a:srgbClr val="C0CCDA"/>
-                      </a:solidFill>
-                      <a:prstDash val="solid"/>
-                      <a:round/>
-                      <a:headEnd type="none" w="med" len="med"/>
-                      <a:tailEnd type="none" w="med" len="med"/>
-                    </a:lnR>
-                    <a:lnT w="12700" cap="flat" cmpd="sng" algn="ctr">
-                      <a:solidFill>
-                        <a:srgbClr val="C0CCDA"/>
-                      </a:solidFill>
-                      <a:prstDash val="solid"/>
-                      <a:round/>
-                      <a:headEnd type="none" w="med" len="med"/>
-                      <a:tailEnd type="none" w="med" len="med"/>
-                    </a:lnT>
-                    <a:lnB w="12700" cap="flat" cmpd="sng" algn="ctr">
-                      <a:solidFill>
-                        <a:srgbClr val="C0CCDA"/>
-                      </a:solidFill>
-                      <a:prstDash val="solid"/>
-                      <a:round/>
-                      <a:headEnd type="none" w="med" len="med"/>
-                      <a:tailEnd type="none" w="med" len="med"/>
-                    </a:lnB>
-                    <a:solidFill>
-                      <a:srgbClr val="0077B6"/>
-                    </a:solidFill>
-                  </a:tcPr>
-                </a:tc>
-                <a:tc>
-                  <a:txBody>
-                    <a:bodyPr/>
-                    <a:lstStyle/>
-                    <a:p>
-                      <a:pPr marL="0" indent="0">
-                        <a:buNone/>
-                      </a:pPr>
-                      <a:r>
-                        <a:rPr lang="en-US" sz="1200" b="1" dirty="0">
-                          <a:solidFill>
-                            <a:srgbClr val="FFFFFF"/>
-                          </a:solidFill>
-                          <a:latin typeface="Calibri" pitchFamily="34" charset="0"/>
-                          <a:ea typeface="Calibri" pitchFamily="34" charset="-122"/>
-                          <a:cs typeface="Calibri" pitchFamily="34" charset="-120"/>
-                        </a:rPr>
-                        <a:t>Rango</a:t>
-                      </a:r>
-                      <a:endParaRPr lang="en-US" sz="1200" dirty="0">
-                        <a:latin typeface="Calibri" charset="0"/>
-                        <a:ea typeface="Calibri" charset="0"/>
-                        <a:cs typeface="Calibri" charset="0"/>
-                      </a:endParaRPr>
-                    </a:p>
-                  </a:txBody>
-                  <a:tcPr>
-                    <a:lnL w="12700" cap="flat" cmpd="sng" algn="ctr">
-                      <a:solidFill>
-                        <a:srgbClr val="C0CCDA"/>
-                      </a:solidFill>
-                      <a:prstDash val="solid"/>
-                      <a:round/>
-                      <a:headEnd type="none" w="med" len="med"/>
-                      <a:tailEnd type="none" w="med" len="med"/>
-                    </a:lnL>
-                    <a:lnR w="12700" cap="flat" cmpd="sng" algn="ctr">
-                      <a:solidFill>
-                        <a:srgbClr val="C0CCDA"/>
-                      </a:solidFill>
-                      <a:prstDash val="solid"/>
-                      <a:round/>
-                      <a:headEnd type="none" w="med" len="med"/>
-                      <a:tailEnd type="none" w="med" len="med"/>
-                    </a:lnR>
-                    <a:lnT w="12700" cap="flat" cmpd="sng" algn="ctr">
-                      <a:solidFill>
-                        <a:srgbClr val="C0CCDA"/>
-                      </a:solidFill>
-                      <a:prstDash val="solid"/>
-                      <a:round/>
-                      <a:headEnd type="none" w="med" len="med"/>
-                      <a:tailEnd type="none" w="med" len="med"/>
-                    </a:lnT>
-                    <a:lnB w="12700" cap="flat" cmpd="sng" algn="ctr">
-                      <a:solidFill>
-                        <a:srgbClr val="C0CCDA"/>
-                      </a:solidFill>
-                      <a:prstDash val="solid"/>
-                      <a:round/>
-                      <a:headEnd type="none" w="med" len="med"/>
-                      <a:tailEnd type="none" w="med" len="med"/>
-                    </a:lnB>
-                    <a:solidFill>
-                      <a:srgbClr val="0077B6"/>
-                    </a:solidFill>
-                  </a:tcPr>
-                </a:tc>
-                <a:tc>
-                  <a:txBody>
-                    <a:bodyPr/>
-                    <a:lstStyle/>
-                    <a:p>
-                      <a:pPr marL="0" indent="0">
-                        <a:buNone/>
-                      </a:pPr>
-                      <a:r>
-                        <a:rPr lang="en-US" sz="1200" b="1" dirty="0">
-                          <a:solidFill>
-                            <a:srgbClr val="FFFFFF"/>
-                          </a:solidFill>
-                          <a:latin typeface="Calibri" pitchFamily="34" charset="0"/>
-                          <a:ea typeface="Calibri" pitchFamily="34" charset="-122"/>
-                          <a:cs typeface="Calibri" pitchFamily="34" charset="-120"/>
-                        </a:rPr>
-                        <a:t>Precisión</a:t>
-                      </a:r>
-                      <a:endParaRPr lang="en-US" sz="1200" dirty="0">
-                        <a:latin typeface="Calibri" charset="0"/>
-                        <a:ea typeface="Calibri" charset="0"/>
-                        <a:cs typeface="Calibri" charset="0"/>
-                      </a:endParaRPr>
-                    </a:p>
-                  </a:txBody>
-                  <a:tcPr>
-                    <a:lnL w="12700" cap="flat" cmpd="sng" algn="ctr">
-                      <a:solidFill>
-                        <a:srgbClr val="C0CCDA"/>
-                      </a:solidFill>
-                      <a:prstDash val="solid"/>
-                      <a:round/>
-                      <a:headEnd type="none" w="med" len="med"/>
-                      <a:tailEnd type="none" w="med" len="med"/>
-                    </a:lnL>
-                    <a:lnR w="12700" cap="flat" cmpd="sng" algn="ctr">
-                      <a:solidFill>
-                        <a:srgbClr val="C0CCDA"/>
-                      </a:solidFill>
-                      <a:prstDash val="solid"/>
-                      <a:round/>
-                      <a:headEnd type="none" w="med" len="med"/>
-                      <a:tailEnd type="none" w="med" len="med"/>
-                    </a:lnR>
-                    <a:lnT w="12700" cap="flat" cmpd="sng" algn="ctr">
-                      <a:solidFill>
-                        <a:srgbClr val="C0CCDA"/>
-                      </a:solidFill>
-                      <a:prstDash val="solid"/>
-                      <a:round/>
-                      <a:headEnd type="none" w="med" len="med"/>
-                      <a:tailEnd type="none" w="med" len="med"/>
-                    </a:lnT>
-                    <a:lnB w="12700" cap="flat" cmpd="sng" algn="ctr">
-                      <a:solidFill>
-                        <a:srgbClr val="C0CCDA"/>
-                      </a:solidFill>
-                      <a:prstDash val="solid"/>
-                      <a:round/>
-                      <a:headEnd type="none" w="med" len="med"/>
-                      <a:tailEnd type="none" w="med" len="med"/>
-                    </a:lnB>
-                    <a:solidFill>
-                      <a:srgbClr val="0077B6"/>
-                    </a:solidFill>
-                  </a:tcPr>
-                </a:tc>
-                <a:extLst>
-                  <a:ext uri="{0D108BD9-81ED-4DB2-BD59-A6C34878D82A}">
-                    <a16:rowId xmlns:a16="http://schemas.microsoft.com/office/drawing/2014/main" val="10000"/>
-                  </a:ext>
-                </a:extLst>
-              </a:tr>
-              <a:tr h="411480">
-                <a:tc>
-                  <a:txBody>
-                    <a:bodyPr/>
-                    <a:lstStyle/>
-                    <a:p>
-                      <a:pPr marL="0" indent="0">
-                        <a:buNone/>
-                      </a:pPr>
-                      <a:r>
-                        <a:rPr lang="en-US" sz="1200" dirty="0">
-                          <a:solidFill>
-                            <a:srgbClr val="000000"/>
-                          </a:solidFill>
-                          <a:latin typeface="Calibri" pitchFamily="34" charset="0"/>
-                          <a:ea typeface="Calibri" pitchFamily="34" charset="-122"/>
-                          <a:cs typeface="Calibri" pitchFamily="34" charset="-120"/>
-                        </a:rPr>
-                        <a:t>Q23.8</a:t>
-                      </a:r>
-                      <a:endParaRPr lang="en-US" sz="1200" dirty="0">
-                        <a:latin typeface="Calibri" charset="0"/>
-                        <a:ea typeface="Calibri" charset="0"/>
-                        <a:cs typeface="Calibri" charset="0"/>
-                      </a:endParaRPr>
-                    </a:p>
-                  </a:txBody>
-                  <a:tcPr>
-                    <a:lnL w="12700" cap="flat" cmpd="sng" algn="ctr">
-                      <a:solidFill>
-                        <a:srgbClr val="C0CCDA"/>
-                      </a:solidFill>
-                      <a:prstDash val="solid"/>
-                      <a:round/>
-                      <a:headEnd type="none" w="med" len="med"/>
-                      <a:tailEnd type="none" w="med" len="med"/>
-                    </a:lnL>
-                    <a:lnR w="12700" cap="flat" cmpd="sng" algn="ctr">
-                      <a:solidFill>
-                        <a:srgbClr val="C0CCDA"/>
-                      </a:solidFill>
-                      <a:prstDash val="solid"/>
-                      <a:round/>
-                      <a:headEnd type="none" w="med" len="med"/>
-                      <a:tailEnd type="none" w="med" len="med"/>
-                    </a:lnR>
-                    <a:lnT w="12700" cap="flat" cmpd="sng" algn="ctr">
-                      <a:solidFill>
-                        <a:srgbClr val="C0CCDA"/>
-                      </a:solidFill>
-                      <a:prstDash val="solid"/>
-                      <a:round/>
-                      <a:headEnd type="none" w="med" len="med"/>
-                      <a:tailEnd type="none" w="med" len="med"/>
-                    </a:lnT>
-                    <a:lnB w="12700" cap="flat" cmpd="sng" algn="ctr">
-                      <a:solidFill>
-                        <a:srgbClr val="C0CCDA"/>
-                      </a:solidFill>
-                      <a:prstDash val="solid"/>
-                      <a:round/>
-                      <a:headEnd type="none" w="med" len="med"/>
-                      <a:tailEnd type="none" w="med" len="med"/>
-                    </a:lnB>
-                    <a:solidFill>
-                      <a:srgbClr val="FFFFFF"/>
-                    </a:solidFill>
-                  </a:tcPr>
-                </a:tc>
-                <a:tc>
-                  <a:txBody>
-                    <a:bodyPr/>
-                    <a:lstStyle/>
-                    <a:p>
-                      <a:pPr marL="0" indent="0">
-                        <a:buNone/>
-                      </a:pPr>
-                      <a:r>
-                        <a:rPr lang="en-US" sz="1200" dirty="0">
-                          <a:solidFill>
-                            <a:srgbClr val="000000"/>
-                          </a:solidFill>
-                          <a:latin typeface="Calibri" pitchFamily="34" charset="0"/>
-                          <a:ea typeface="Calibri" pitchFamily="34" charset="-122"/>
-                          <a:cs typeface="Calibri" pitchFamily="34" charset="-120"/>
-                        </a:rPr>
-                        <a:t>−8M … +8M</a:t>
-                      </a:r>
-                      <a:endParaRPr lang="en-US" sz="1200" dirty="0">
-                        <a:latin typeface="Calibri" charset="0"/>
-                        <a:ea typeface="Calibri" charset="0"/>
-                        <a:cs typeface="Calibri" charset="0"/>
-                      </a:endParaRPr>
-                    </a:p>
-                  </a:txBody>
-                  <a:tcPr>
-                    <a:lnL w="12700" cap="flat" cmpd="sng" algn="ctr">
-                      <a:solidFill>
-                        <a:srgbClr val="C0CCDA"/>
-                      </a:solidFill>
-                      <a:prstDash val="solid"/>
-                      <a:round/>
-                      <a:headEnd type="none" w="med" len="med"/>
-                      <a:tailEnd type="none" w="med" len="med"/>
-                    </a:lnL>
-                    <a:lnR w="12700" cap="flat" cmpd="sng" algn="ctr">
-                      <a:solidFill>
-                        <a:srgbClr val="C0CCDA"/>
-                      </a:solidFill>
-                      <a:prstDash val="solid"/>
-                      <a:round/>
-                      <a:headEnd type="none" w="med" len="med"/>
-                      <a:tailEnd type="none" w="med" len="med"/>
-                    </a:lnR>
-                    <a:lnT w="12700" cap="flat" cmpd="sng" algn="ctr">
-                      <a:solidFill>
-                        <a:srgbClr val="C0CCDA"/>
-                      </a:solidFill>
-                      <a:prstDash val="solid"/>
-                      <a:round/>
-                      <a:headEnd type="none" w="med" len="med"/>
-                      <a:tailEnd type="none" w="med" len="med"/>
-                    </a:lnT>
-                    <a:lnB w="12700" cap="flat" cmpd="sng" algn="ctr">
-                      <a:solidFill>
-                        <a:srgbClr val="C0CCDA"/>
-                      </a:solidFill>
-                      <a:prstDash val="solid"/>
-                      <a:round/>
-                      <a:headEnd type="none" w="med" len="med"/>
-                      <a:tailEnd type="none" w="med" len="med"/>
-                    </a:lnB>
-                    <a:solidFill>
-                      <a:srgbClr val="FFFFFF"/>
-                    </a:solidFill>
-                  </a:tcPr>
-                </a:tc>
-                <a:tc>
-                  <a:txBody>
-                    <a:bodyPr/>
-                    <a:lstStyle/>
-                    <a:p>
-                      <a:pPr marL="0" indent="0">
-                        <a:buNone/>
-                      </a:pPr>
-                      <a:r>
-                        <a:rPr lang="en-US" sz="1200" dirty="0">
-                          <a:solidFill>
-                            <a:srgbClr val="000000"/>
-                          </a:solidFill>
-                          <a:latin typeface="Calibri" pitchFamily="34" charset="0"/>
-                          <a:ea typeface="Calibri" pitchFamily="34" charset="-122"/>
-                          <a:cs typeface="Calibri" pitchFamily="34" charset="-120"/>
-                        </a:rPr>
-                        <a:t>1/256 ≈ 0.0039</a:t>
-                      </a:r>
-                      <a:endParaRPr lang="en-US" sz="1200" dirty="0">
-                        <a:latin typeface="Calibri" charset="0"/>
-                        <a:ea typeface="Calibri" charset="0"/>
-                        <a:cs typeface="Calibri" charset="0"/>
-                      </a:endParaRPr>
-                    </a:p>
-                  </a:txBody>
-                  <a:tcPr>
-                    <a:lnL w="12700" cap="flat" cmpd="sng" algn="ctr">
-                      <a:solidFill>
-                        <a:srgbClr val="C0CCDA"/>
-                      </a:solidFill>
-                      <a:prstDash val="solid"/>
-                      <a:round/>
-                      <a:headEnd type="none" w="med" len="med"/>
-                      <a:tailEnd type="none" w="med" len="med"/>
-                    </a:lnL>
-                    <a:lnR w="12700" cap="flat" cmpd="sng" algn="ctr">
-                      <a:solidFill>
-                        <a:srgbClr val="C0CCDA"/>
-                      </a:solidFill>
-                      <a:prstDash val="solid"/>
-                      <a:round/>
-                      <a:headEnd type="none" w="med" len="med"/>
-                      <a:tailEnd type="none" w="med" len="med"/>
-                    </a:lnR>
-                    <a:lnT w="12700" cap="flat" cmpd="sng" algn="ctr">
-                      <a:solidFill>
-                        <a:srgbClr val="C0CCDA"/>
-                      </a:solidFill>
-                      <a:prstDash val="solid"/>
-                      <a:round/>
-                      <a:headEnd type="none" w="med" len="med"/>
-                      <a:tailEnd type="none" w="med" len="med"/>
-                    </a:lnT>
-                    <a:lnB w="12700" cap="flat" cmpd="sng" algn="ctr">
-                      <a:solidFill>
-                        <a:srgbClr val="C0CCDA"/>
-                      </a:solidFill>
-                      <a:prstDash val="solid"/>
-                      <a:round/>
-                      <a:headEnd type="none" w="med" len="med"/>
-                      <a:tailEnd type="none" w="med" len="med"/>
-                    </a:lnB>
-                    <a:solidFill>
-                      <a:srgbClr val="FFFFFF"/>
-                    </a:solidFill>
-                  </a:tcPr>
-                </a:tc>
-                <a:extLst>
-                  <a:ext uri="{0D108BD9-81ED-4DB2-BD59-A6C34878D82A}">
-                    <a16:rowId xmlns:a16="http://schemas.microsoft.com/office/drawing/2014/main" val="10001"/>
-                  </a:ext>
-                </a:extLst>
-              </a:tr>
-              <a:tr h="411480">
-                <a:tc>
-                  <a:txBody>
-                    <a:bodyPr/>
-                    <a:lstStyle/>
-                    <a:p>
-                      <a:pPr marL="0" indent="0">
-                        <a:buNone/>
-                      </a:pPr>
-                      <a:r>
-                        <a:rPr lang="en-US" sz="1200" dirty="0">
-                          <a:solidFill>
-                            <a:srgbClr val="000000"/>
-                          </a:solidFill>
-                          <a:latin typeface="Calibri" pitchFamily="34" charset="0"/>
-                          <a:ea typeface="Calibri" pitchFamily="34" charset="-122"/>
-                          <a:cs typeface="Calibri" pitchFamily="34" charset="-120"/>
-                        </a:rPr>
-                        <a:t>Q21.10</a:t>
-                      </a:r>
-                      <a:endParaRPr lang="en-US" sz="1200" dirty="0">
-                        <a:latin typeface="Calibri" charset="0"/>
-                        <a:ea typeface="Calibri" charset="0"/>
-                        <a:cs typeface="Calibri" charset="0"/>
-                      </a:endParaRPr>
-                    </a:p>
-                  </a:txBody>
-                  <a:tcPr>
-                    <a:lnL w="12700" cap="flat" cmpd="sng" algn="ctr">
-                      <a:solidFill>
-                        <a:srgbClr val="C0CCDA"/>
-                      </a:solidFill>
-                      <a:prstDash val="solid"/>
-                      <a:round/>
-                      <a:headEnd type="none" w="med" len="med"/>
-                      <a:tailEnd type="none" w="med" len="med"/>
-                    </a:lnL>
-                    <a:lnR w="12700" cap="flat" cmpd="sng" algn="ctr">
-                      <a:solidFill>
-                        <a:srgbClr val="C0CCDA"/>
-                      </a:solidFill>
-                      <a:prstDash val="solid"/>
-                      <a:round/>
-                      <a:headEnd type="none" w="med" len="med"/>
-                      <a:tailEnd type="none" w="med" len="med"/>
-                    </a:lnR>
-                    <a:lnT w="12700" cap="flat" cmpd="sng" algn="ctr">
-                      <a:solidFill>
-                        <a:srgbClr val="C0CCDA"/>
-                      </a:solidFill>
-                      <a:prstDash val="solid"/>
-                      <a:round/>
-                      <a:headEnd type="none" w="med" len="med"/>
-                      <a:tailEnd type="none" w="med" len="med"/>
-                    </a:lnT>
-                    <a:lnB w="12700" cap="flat" cmpd="sng" algn="ctr">
-                      <a:solidFill>
-                        <a:srgbClr val="C0CCDA"/>
-                      </a:solidFill>
-                      <a:prstDash val="solid"/>
-                      <a:round/>
-                      <a:headEnd type="none" w="med" len="med"/>
-                      <a:tailEnd type="none" w="med" len="med"/>
-                    </a:lnB>
-                    <a:solidFill>
-                      <a:srgbClr val="FFFFFF"/>
-                    </a:solidFill>
-                  </a:tcPr>
-                </a:tc>
-                <a:tc>
-                  <a:txBody>
-                    <a:bodyPr/>
-                    <a:lstStyle/>
-                    <a:p>
-                      <a:pPr marL="0" indent="0">
-                        <a:buNone/>
-                      </a:pPr>
-                      <a:r>
-                        <a:rPr lang="en-US" sz="1200" dirty="0">
-                          <a:solidFill>
-                            <a:srgbClr val="000000"/>
-                          </a:solidFill>
-                          <a:latin typeface="Calibri" pitchFamily="34" charset="0"/>
-                          <a:ea typeface="Calibri" pitchFamily="34" charset="-122"/>
-                          <a:cs typeface="Calibri" pitchFamily="34" charset="-120"/>
-                        </a:rPr>
-                        <a:t>−2M … +2M</a:t>
-                      </a:r>
-                      <a:endParaRPr lang="en-US" sz="1200" dirty="0">
-                        <a:latin typeface="Calibri" charset="0"/>
-                        <a:ea typeface="Calibri" charset="0"/>
-                        <a:cs typeface="Calibri" charset="0"/>
-                      </a:endParaRPr>
-                    </a:p>
-                  </a:txBody>
-                  <a:tcPr>
-                    <a:lnL w="12700" cap="flat" cmpd="sng" algn="ctr">
-                      <a:solidFill>
-                        <a:srgbClr val="C0CCDA"/>
-                      </a:solidFill>
-                      <a:prstDash val="solid"/>
-                      <a:round/>
-                      <a:headEnd type="none" w="med" len="med"/>
-                      <a:tailEnd type="none" w="med" len="med"/>
-                    </a:lnL>
-                    <a:lnR w="12700" cap="flat" cmpd="sng" algn="ctr">
-                      <a:solidFill>
-                        <a:srgbClr val="C0CCDA"/>
-                      </a:solidFill>
-                      <a:prstDash val="solid"/>
-                      <a:round/>
-                      <a:headEnd type="none" w="med" len="med"/>
-                      <a:tailEnd type="none" w="med" len="med"/>
-                    </a:lnR>
-                    <a:lnT w="12700" cap="flat" cmpd="sng" algn="ctr">
-                      <a:solidFill>
-                        <a:srgbClr val="C0CCDA"/>
-                      </a:solidFill>
-                      <a:prstDash val="solid"/>
-                      <a:round/>
-                      <a:headEnd type="none" w="med" len="med"/>
-                      <a:tailEnd type="none" w="med" len="med"/>
-                    </a:lnT>
-                    <a:lnB w="12700" cap="flat" cmpd="sng" algn="ctr">
-                      <a:solidFill>
-                        <a:srgbClr val="C0CCDA"/>
-                      </a:solidFill>
-                      <a:prstDash val="solid"/>
-                      <a:round/>
-                      <a:headEnd type="none" w="med" len="med"/>
-                      <a:tailEnd type="none" w="med" len="med"/>
-                    </a:lnB>
-                    <a:solidFill>
-                      <a:srgbClr val="FFFFFF"/>
-                    </a:solidFill>
-                  </a:tcPr>
-                </a:tc>
-                <a:tc>
-                  <a:txBody>
-                    <a:bodyPr/>
-                    <a:lstStyle/>
-                    <a:p>
-                      <a:pPr marL="0" indent="0">
-                        <a:buNone/>
-                      </a:pPr>
-                      <a:r>
-                        <a:rPr lang="en-US" sz="1200" dirty="0">
-                          <a:solidFill>
-                            <a:srgbClr val="000000"/>
-                          </a:solidFill>
-                          <a:latin typeface="Calibri" pitchFamily="34" charset="0"/>
-                          <a:ea typeface="Calibri" pitchFamily="34" charset="-122"/>
-                          <a:cs typeface="Calibri" pitchFamily="34" charset="-120"/>
-                        </a:rPr>
-                        <a:t>1/1024 ≈ 0.001</a:t>
-                      </a:r>
-                      <a:endParaRPr lang="en-US" sz="1200" dirty="0">
-                        <a:latin typeface="Calibri" charset="0"/>
-                        <a:ea typeface="Calibri" charset="0"/>
-                        <a:cs typeface="Calibri" charset="0"/>
-                      </a:endParaRPr>
-                    </a:p>
-                  </a:txBody>
-                  <a:tcPr>
-                    <a:lnL w="12700" cap="flat" cmpd="sng" algn="ctr">
-                      <a:solidFill>
-                        <a:srgbClr val="C0CCDA"/>
-                      </a:solidFill>
-                      <a:prstDash val="solid"/>
-                      <a:round/>
-                      <a:headEnd type="none" w="med" len="med"/>
-                      <a:tailEnd type="none" w="med" len="med"/>
-                    </a:lnL>
-                    <a:lnR w="12700" cap="flat" cmpd="sng" algn="ctr">
-                      <a:solidFill>
-                        <a:srgbClr val="C0CCDA"/>
-                      </a:solidFill>
-                      <a:prstDash val="solid"/>
-                      <a:round/>
-                      <a:headEnd type="none" w="med" len="med"/>
-                      <a:tailEnd type="none" w="med" len="med"/>
-                    </a:lnR>
-                    <a:lnT w="12700" cap="flat" cmpd="sng" algn="ctr">
-                      <a:solidFill>
-                        <a:srgbClr val="C0CCDA"/>
-                      </a:solidFill>
-                      <a:prstDash val="solid"/>
-                      <a:round/>
-                      <a:headEnd type="none" w="med" len="med"/>
-                      <a:tailEnd type="none" w="med" len="med"/>
-                    </a:lnT>
-                    <a:lnB w="12700" cap="flat" cmpd="sng" algn="ctr">
-                      <a:solidFill>
-                        <a:srgbClr val="C0CCDA"/>
-                      </a:solidFill>
-                      <a:prstDash val="solid"/>
-                      <a:round/>
-                      <a:headEnd type="none" w="med" len="med"/>
-                      <a:tailEnd type="none" w="med" len="med"/>
-                    </a:lnB>
-                    <a:solidFill>
-                      <a:srgbClr val="FFFFFF"/>
-                    </a:solidFill>
-                  </a:tcPr>
-                </a:tc>
-                <a:extLst>
-                  <a:ext uri="{0D108BD9-81ED-4DB2-BD59-A6C34878D82A}">
-                    <a16:rowId xmlns:a16="http://schemas.microsoft.com/office/drawing/2014/main" val="10002"/>
-                  </a:ext>
-                </a:extLst>
-              </a:tr>
-            </a:tbl>
-          </a:graphicData>
-        </a:graphic>
-      </p:graphicFrame>
-      <p:sp>
-        <p:nvSpPr>
-          <p:cNvPr id="8" name="Shape 5"/>
-          <p:cNvSpPr/>
-          <p:nvPr/>
-        </p:nvSpPr>
-        <p:spPr>
-          <a:xfrm>
-            <a:off x="365760" y="3566160"/>
-            <a:ext cx="8412480" cy="1188720"/>
-          </a:xfrm>
-          <a:prstGeom prst="rect">
-            <a:avLst/>
-          </a:prstGeom>
-          <a:solidFill>
-            <a:srgbClr val="1E2D3D"/>
-          </a:solidFill>
-          <a:ln w="12700">
-            <a:solidFill>
-              <a:srgbClr val="00B4D8"/>
-            </a:solidFill>
-            <a:prstDash val="solid"/>
-          </a:ln>
-        </p:spPr>
-      </p:sp>
-      <p:sp>
-        <p:nvSpPr>
-          <p:cNvPr id="9" name="Text 6"/>
-          <p:cNvSpPr/>
-          <p:nvPr/>
-        </p:nvSpPr>
-        <p:spPr>
-          <a:xfrm>
-            <a:off x="548640" y="3611880"/>
-            <a:ext cx="8046720" cy="1005840"/>
-          </a:xfrm>
-          <a:prstGeom prst="rect">
-            <a:avLst/>
-          </a:prstGeom>
-          <a:noFill/>
-          <a:ln/>
-        </p:spPr>
-        <p:txBody>
-          <a:bodyPr wrap="square" rtlCol="0" anchor="ctr"/>
-          <a:lstStyle/>
-          <a:p>
-            <a:pPr marL="0" indent="0">
-              <a:lnSpc>
-                <a:spcPct val="150000"/>
-              </a:lnSpc>
-              <a:buNone/>
-            </a:pPr>
-            <a:r>
-              <a:rPr lang="en-US" sz="1400" b="1" dirty="0">
-                <a:solidFill>
-                  <a:srgbClr val="00B4D8"/>
-                </a:solidFill>
-                <a:latin typeface="Consolas" pitchFamily="34" charset="0"/>
-                <a:ea typeface="Consolas" pitchFamily="34" charset="-122"/>
-                <a:cs typeface="Consolas" pitchFamily="34" charset="-120"/>
-              </a:rPr>
-              <a:t>fp2fx:</a:t>
-            </a:r>
-            <a:r>
-              <a:rPr lang="en-US" sz="1400" dirty="0">
-                <a:solidFill>
-                  <a:srgbClr val="FFFFFF"/>
-                </a:solidFill>
-                <a:latin typeface="Consolas" pitchFamily="34" charset="0"/>
-                <a:ea typeface="Consolas" pitchFamily="34" charset="-122"/>
-                <a:cs typeface="Consolas" pitchFamily="34" charset="-120"/>
-              </a:rPr>
-              <a:t>  valor_fx = (int)(valor_float × 2ⁿ)
-</a:t>
-            </a:r>
-            <a:r>
-              <a:rPr lang="en-US" sz="1400" b="1" dirty="0">
-                <a:solidFill>
-                  <a:srgbClr val="00B4D8"/>
-                </a:solidFill>
-                <a:latin typeface="Consolas" pitchFamily="34" charset="0"/>
-                <a:ea typeface="Consolas" pitchFamily="34" charset="-122"/>
-                <a:cs typeface="Consolas" pitchFamily="34" charset="-120"/>
-              </a:rPr>
-              <a:t>fx2fp:</a:t>
-            </a:r>
-            <a:r>
-              <a:rPr lang="en-US" sz="1400" dirty="0">
-                <a:solidFill>
-                  <a:srgbClr val="FFFFFF"/>
-                </a:solidFill>
-                <a:latin typeface="Consolas" pitchFamily="34" charset="0"/>
-                <a:ea typeface="Consolas" pitchFamily="34" charset="-122"/>
-                <a:cs typeface="Consolas" pitchFamily="34" charset="-120"/>
-              </a:rPr>
-              <a:t>  valor_float = (float)valor_fx / 2ⁿ</a:t>
-            </a:r>
-            <a:endParaRPr lang="en-US" sz="1400" dirty="0"/>
-          </a:p>
-        </p:txBody>
-      </p:sp>
-    </p:spTree>
-  </p:cSld>
-  <p:clrMapOvr>
-    <a:masterClrMapping/>
-  </p:clrMapOvr>
-</p:sld>
-</file>
-
-<file path=ppt/slides/slide4.xml><?xml version="1.0" encoding="utf-8"?>
-<p:sld xmlns:a="http://schemas.openxmlformats.org/drawingml/2006/main" xmlns:r="http://schemas.openxmlformats.org/officeDocument/2006/relationships" xmlns:p="http://schemas.openxmlformats.org/presentationml/2006/main">
   <p:cSld name="Slide 4">
     <p:bg>
       <p:bgPr>
@@ -4110,6 +2849,66 @@
           </a:p>
         </p:txBody>
       </p:sp>
+      <p:pic>
+        <p:nvPicPr>
+          <p:cNvPr id="7" name="Imagen 6">
+            <a:extLst>
+              <a:ext uri="{FF2B5EF4-FFF2-40B4-BE49-F238E27FC236}">
+                <a16:creationId xmlns:a16="http://schemas.microsoft.com/office/drawing/2014/main" id="{5F581B45-3C02-4399-9282-4587570225D9}"/>
+              </a:ext>
+            </a:extLst>
+          </p:cNvPr>
+          <p:cNvPicPr>
+            <a:picLocks noChangeAspect="1"/>
+          </p:cNvPicPr>
+          <p:nvPr/>
+        </p:nvPicPr>
+        <p:blipFill>
+          <a:blip r:embed="rId3"/>
+          <a:stretch>
+            <a:fillRect/>
+          </a:stretch>
+        </p:blipFill>
+        <p:spPr>
+          <a:xfrm>
+            <a:off x="5093904" y="2409772"/>
+            <a:ext cx="3305030" cy="679982"/>
+          </a:xfrm>
+          <a:prstGeom prst="rect">
+            <a:avLst/>
+          </a:prstGeom>
+        </p:spPr>
+      </p:pic>
+      <p:pic>
+        <p:nvPicPr>
+          <p:cNvPr id="9" name="Imagen 8">
+            <a:extLst>
+              <a:ext uri="{FF2B5EF4-FFF2-40B4-BE49-F238E27FC236}">
+                <a16:creationId xmlns:a16="http://schemas.microsoft.com/office/drawing/2014/main" id="{F031E333-488E-4A60-8B42-69E10FA65042}"/>
+              </a:ext>
+            </a:extLst>
+          </p:cNvPr>
+          <p:cNvPicPr>
+            <a:picLocks noChangeAspect="1"/>
+          </p:cNvPicPr>
+          <p:nvPr/>
+        </p:nvPicPr>
+        <p:blipFill>
+          <a:blip r:embed="rId4"/>
+          <a:stretch>
+            <a:fillRect/>
+          </a:stretch>
+        </p:blipFill>
+        <p:spPr>
+          <a:xfrm>
+            <a:off x="5084769" y="941927"/>
+            <a:ext cx="3323299" cy="697299"/>
+          </a:xfrm>
+          <a:prstGeom prst="rect">
+            <a:avLst/>
+          </a:prstGeom>
+        </p:spPr>
+      </p:pic>
     </p:spTree>
   </p:cSld>
   <p:clrMapOvr>
@@ -4118,7 +2917,7 @@
 </p:sld>
 </file>
 
-<file path=ppt/slides/slide5.xml><?xml version="1.0" encoding="utf-8"?>
+<file path=ppt/slides/slide4.xml><?xml version="1.0" encoding="utf-8"?>
 <p:sld xmlns:a="http://schemas.openxmlformats.org/drawingml/2006/main" xmlns:r="http://schemas.openxmlformats.org/officeDocument/2006/relationships" xmlns:p="http://schemas.openxmlformats.org/presentationml/2006/main">
   <p:cSld name="Slide 5">
     <p:bg>
@@ -5490,604 +4289,29 @@
                 <a:ea typeface="Calibri" pitchFamily="34" charset="-122"/>
                 <a:cs typeface="Calibri" pitchFamily="34" charset="-120"/>
               </a:rPr>
-              <a:t>A mayor cantidad de bits fraccionarios, mayor precisión. Q21.10 ofrece una precisión ~7x mejor que Q23.8 para representar 2.4515, con un error de sólo 0.000328.</a:t>
-            </a:r>
-            <a:endParaRPr lang="en-US" sz="1300" dirty="0"/>
-          </a:p>
-        </p:txBody>
-      </p:sp>
-    </p:spTree>
-  </p:cSld>
-  <p:clrMapOvr>
-    <a:masterClrMapping/>
-  </p:clrMapOvr>
-</p:sld>
-</file>
-
-<file path=ppt/slides/slide6.xml><?xml version="1.0" encoding="utf-8"?>
-<p:sld xmlns:a="http://schemas.openxmlformats.org/drawingml/2006/main" xmlns:r="http://schemas.openxmlformats.org/officeDocument/2006/relationships" xmlns:p="http://schemas.openxmlformats.org/presentationml/2006/main">
-  <p:cSld name="Slide 7">
-    <p:bg>
-      <p:bgPr>
-        <a:solidFill>
-          <a:srgbClr val="0D1B2A"/>
-        </a:solidFill>
-        <a:effectLst/>
-      </p:bgPr>
-    </p:bg>
-    <p:spTree>
-      <p:nvGrpSpPr>
-        <p:cNvPr id="1" name=""/>
-        <p:cNvGrpSpPr/>
-        <p:nvPr/>
-      </p:nvGrpSpPr>
-      <p:grpSpPr>
-        <a:xfrm>
-          <a:off x="0" y="0"/>
-          <a:ext cx="0" cy="0"/>
-          <a:chOff x="0" y="0"/>
-          <a:chExt cx="0" cy="0"/>
-        </a:xfrm>
-      </p:grpSpPr>
-      <p:sp>
-        <p:nvSpPr>
-          <p:cNvPr id="2" name="Shape 0"/>
-          <p:cNvSpPr/>
-          <p:nvPr/>
-        </p:nvSpPr>
-        <p:spPr>
-          <a:xfrm>
-            <a:off x="0" y="0"/>
-            <a:ext cx="164592" cy="5143500"/>
-          </a:xfrm>
-          <a:prstGeom prst="rect">
-            <a:avLst/>
-          </a:prstGeom>
-          <a:solidFill>
-            <a:srgbClr val="00B4D8"/>
-          </a:solidFill>
-          <a:ln w="12700">
-            <a:solidFill>
-              <a:srgbClr val="00B4D8"/>
-            </a:solidFill>
-            <a:prstDash val="solid"/>
-          </a:ln>
-        </p:spPr>
-      </p:sp>
-      <p:sp>
-        <p:nvSpPr>
-          <p:cNvPr id="3" name="Text 1"/>
-          <p:cNvSpPr/>
-          <p:nvPr/>
-        </p:nvSpPr>
-        <p:spPr>
-          <a:xfrm>
-            <a:off x="411480" y="411480"/>
-            <a:ext cx="8412480" cy="640080"/>
-          </a:xfrm>
-          <a:prstGeom prst="rect">
-            <a:avLst/>
-          </a:prstGeom>
-          <a:noFill/>
-          <a:ln/>
-        </p:spPr>
-        <p:txBody>
-          <a:bodyPr wrap="square" rtlCol="0" anchor="ctr"/>
-          <a:lstStyle/>
-          <a:p>
-            <a:pPr marL="0" indent="0">
-              <a:buNone/>
-            </a:pPr>
-            <a:r>
-              <a:rPr lang="en-US" sz="3400" b="1" dirty="0">
-                <a:solidFill>
-                  <a:srgbClr val="FFFFFF"/>
+              <a:t>A mayor cantidad de bits fraccionarios, mayor precisión. Q21.10 ofrece una </a:t>
+            </a:r>
+            <a:r>
+              <a:rPr lang="en-US" sz="1300" dirty="0" err="1">
+                <a:solidFill>
+                  <a:srgbClr val="0D1B2A"/>
                 </a:solidFill>
                 <a:latin typeface="Calibri" pitchFamily="34" charset="0"/>
                 <a:ea typeface="Calibri" pitchFamily="34" charset="-122"/>
                 <a:cs typeface="Calibri" pitchFamily="34" charset="-120"/>
               </a:rPr>
-              <a:t>Conclusiones</a:t>
-            </a:r>
-            <a:endParaRPr lang="en-US" sz="3400" dirty="0"/>
-          </a:p>
-        </p:txBody>
-      </p:sp>
-      <p:sp>
-        <p:nvSpPr>
-          <p:cNvPr id="4" name="Shape 2"/>
-          <p:cNvSpPr/>
-          <p:nvPr/>
-        </p:nvSpPr>
-        <p:spPr>
-          <a:xfrm>
-            <a:off x="411480" y="1243584"/>
-            <a:ext cx="292608" cy="292608"/>
-          </a:xfrm>
-          <a:prstGeom prst="ellipse">
-            <a:avLst/>
-          </a:prstGeom>
-          <a:solidFill>
-            <a:srgbClr val="00B4D8"/>
-          </a:solidFill>
-          <a:ln w="12700">
-            <a:solidFill>
-              <a:srgbClr val="00B4D8"/>
-            </a:solidFill>
-            <a:prstDash val="solid"/>
-          </a:ln>
-        </p:spPr>
-      </p:sp>
-      <p:sp>
-        <p:nvSpPr>
-          <p:cNvPr id="5" name="Text 3"/>
-          <p:cNvSpPr/>
-          <p:nvPr/>
-        </p:nvSpPr>
-        <p:spPr>
-          <a:xfrm>
-            <a:off x="411480" y="1243584"/>
-            <a:ext cx="292608" cy="292608"/>
-          </a:xfrm>
-          <a:prstGeom prst="rect">
-            <a:avLst/>
-          </a:prstGeom>
-          <a:noFill/>
-          <a:ln/>
-        </p:spPr>
-        <p:txBody>
-          <a:bodyPr wrap="square" rtlCol="0" anchor="ctr"/>
-          <a:lstStyle/>
-          <a:p>
-            <a:pPr marL="0" indent="0" algn="ctr">
-              <a:buNone/>
-            </a:pPr>
-            <a:r>
-              <a:rPr lang="en-US" sz="1100" b="1" dirty="0">
-                <a:solidFill>
-                  <a:srgbClr val="FFFFFF"/>
-                </a:solidFill>
-              </a:rPr>
-              <a:t>1</a:t>
-            </a:r>
-            <a:endParaRPr lang="en-US" sz="1100" dirty="0"/>
-          </a:p>
-        </p:txBody>
-      </p:sp>
-      <p:sp>
-        <p:nvSpPr>
-          <p:cNvPr id="6" name="Text 4"/>
-          <p:cNvSpPr/>
-          <p:nvPr/>
-        </p:nvSpPr>
-        <p:spPr>
-          <a:xfrm>
-            <a:off x="868680" y="1188720"/>
-            <a:ext cx="7863840" cy="658368"/>
-          </a:xfrm>
-          <a:prstGeom prst="rect">
-            <a:avLst/>
-          </a:prstGeom>
-          <a:noFill/>
-          <a:ln/>
-        </p:spPr>
-        <p:txBody>
-          <a:bodyPr wrap="square" rtlCol="0" anchor="ctr"/>
-          <a:lstStyle/>
-          <a:p>
-            <a:pPr marL="0" indent="0">
-              <a:buNone/>
-            </a:pPr>
+              <a:t>precisión</a:t>
+            </a:r>
             <a:r>
               <a:rPr lang="en-US" sz="1300" dirty="0">
                 <a:solidFill>
-                  <a:srgbClr val="C8D8E8"/>
+                  <a:srgbClr val="0D1B2A"/>
                 </a:solidFill>
                 <a:latin typeface="Calibri" pitchFamily="34" charset="0"/>
                 <a:ea typeface="Calibri" pitchFamily="34" charset="-122"/>
                 <a:cs typeface="Calibri" pitchFamily="34" charset="-120"/>
               </a:rPr>
-              <a:t>Las funciones fx2fp() y fp2fx() se implementan con solo dos operaciones: escalar y castear.</a:t>
-            </a:r>
-            <a:endParaRPr lang="en-US" sz="1300" dirty="0"/>
-          </a:p>
-        </p:txBody>
-      </p:sp>
-      <p:sp>
-        <p:nvSpPr>
-          <p:cNvPr id="7" name="Shape 5"/>
-          <p:cNvSpPr/>
-          <p:nvPr/>
-        </p:nvSpPr>
-        <p:spPr>
-          <a:xfrm>
-            <a:off x="411480" y="1993392"/>
-            <a:ext cx="292608" cy="292608"/>
-          </a:xfrm>
-          <a:prstGeom prst="ellipse">
-            <a:avLst/>
-          </a:prstGeom>
-          <a:solidFill>
-            <a:srgbClr val="00B4D8"/>
-          </a:solidFill>
-          <a:ln w="12700">
-            <a:solidFill>
-              <a:srgbClr val="00B4D8"/>
-            </a:solidFill>
-            <a:prstDash val="solid"/>
-          </a:ln>
-        </p:spPr>
-      </p:sp>
-      <p:sp>
-        <p:nvSpPr>
-          <p:cNvPr id="8" name="Text 6"/>
-          <p:cNvSpPr/>
-          <p:nvPr/>
-        </p:nvSpPr>
-        <p:spPr>
-          <a:xfrm>
-            <a:off x="411480" y="1993392"/>
-            <a:ext cx="292608" cy="292608"/>
-          </a:xfrm>
-          <a:prstGeom prst="rect">
-            <a:avLst/>
-          </a:prstGeom>
-          <a:noFill/>
-          <a:ln/>
-        </p:spPr>
-        <p:txBody>
-          <a:bodyPr wrap="square" rtlCol="0" anchor="ctr"/>
-          <a:lstStyle/>
-          <a:p>
-            <a:pPr marL="0" indent="0" algn="ctr">
-              <a:buNone/>
-            </a:pPr>
-            <a:r>
-              <a:rPr lang="en-US" sz="1100" b="1" dirty="0">
-                <a:solidFill>
-                  <a:srgbClr val="FFFFFF"/>
-                </a:solidFill>
-              </a:rPr>
-              <a:t>2</a:t>
-            </a:r>
-            <a:endParaRPr lang="en-US" sz="1100" dirty="0"/>
-          </a:p>
-        </p:txBody>
-      </p:sp>
-      <p:sp>
-        <p:nvSpPr>
-          <p:cNvPr id="9" name="Text 7"/>
-          <p:cNvSpPr/>
-          <p:nvPr/>
-        </p:nvSpPr>
-        <p:spPr>
-          <a:xfrm>
-            <a:off x="868680" y="1938528"/>
-            <a:ext cx="7863840" cy="658368"/>
-          </a:xfrm>
-          <a:prstGeom prst="rect">
-            <a:avLst/>
-          </a:prstGeom>
-          <a:noFill/>
-          <a:ln/>
-        </p:spPr>
-        <p:txBody>
-          <a:bodyPr wrap="square" rtlCol="0" anchor="ctr"/>
-          <a:lstStyle/>
-          <a:p>
-            <a:pPr marL="0" indent="0">
-              <a:buNone/>
-            </a:pPr>
-            <a:r>
-              <a:rPr lang="en-US" sz="1300" dirty="0">
-                <a:solidFill>
-                  <a:srgbClr val="C8D8E8"/>
-                </a:solidFill>
-                <a:latin typeface="Calibri" pitchFamily="34" charset="0"/>
-                <a:ea typeface="Calibri" pitchFamily="34" charset="-122"/>
-                <a:cs typeface="Calibri" pitchFamily="34" charset="-120"/>
-              </a:rPr>
-              <a:t>La conversión introduce error de cuantización: el valor 2.4515 no es representable exactamente en Q23.8 ni Q21.10.</a:t>
-            </a:r>
-            <a:endParaRPr lang="en-US" sz="1300" dirty="0"/>
-          </a:p>
-        </p:txBody>
-      </p:sp>
-      <p:sp>
-        <p:nvSpPr>
-          <p:cNvPr id="10" name="Shape 8"/>
-          <p:cNvSpPr/>
-          <p:nvPr/>
-        </p:nvSpPr>
-        <p:spPr>
-          <a:xfrm>
-            <a:off x="411480" y="2743200"/>
-            <a:ext cx="292608" cy="292608"/>
-          </a:xfrm>
-          <a:prstGeom prst="ellipse">
-            <a:avLst/>
-          </a:prstGeom>
-          <a:solidFill>
-            <a:srgbClr val="00B4D8"/>
-          </a:solidFill>
-          <a:ln w="12700">
-            <a:solidFill>
-              <a:srgbClr val="00B4D8"/>
-            </a:solidFill>
-            <a:prstDash val="solid"/>
-          </a:ln>
-        </p:spPr>
-      </p:sp>
-      <p:sp>
-        <p:nvSpPr>
-          <p:cNvPr id="11" name="Text 9"/>
-          <p:cNvSpPr/>
-          <p:nvPr/>
-        </p:nvSpPr>
-        <p:spPr>
-          <a:xfrm>
-            <a:off x="411480" y="2743200"/>
-            <a:ext cx="292608" cy="292608"/>
-          </a:xfrm>
-          <a:prstGeom prst="rect">
-            <a:avLst/>
-          </a:prstGeom>
-          <a:noFill/>
-          <a:ln/>
-        </p:spPr>
-        <p:txBody>
-          <a:bodyPr wrap="square" rtlCol="0" anchor="ctr"/>
-          <a:lstStyle/>
-          <a:p>
-            <a:pPr marL="0" indent="0" algn="ctr">
-              <a:buNone/>
-            </a:pPr>
-            <a:r>
-              <a:rPr lang="en-US" sz="1100" b="1" dirty="0">
-                <a:solidFill>
-                  <a:srgbClr val="FFFFFF"/>
-                </a:solidFill>
-              </a:rPr>
-              <a:t>3</a:t>
-            </a:r>
-            <a:endParaRPr lang="en-US" sz="1100" dirty="0"/>
-          </a:p>
-        </p:txBody>
-      </p:sp>
-      <p:sp>
-        <p:nvSpPr>
-          <p:cNvPr id="12" name="Text 10"/>
-          <p:cNvSpPr/>
-          <p:nvPr/>
-        </p:nvSpPr>
-        <p:spPr>
-          <a:xfrm>
-            <a:off x="868680" y="2688336"/>
-            <a:ext cx="7863840" cy="658368"/>
-          </a:xfrm>
-          <a:prstGeom prst="rect">
-            <a:avLst/>
-          </a:prstGeom>
-          <a:noFill/>
-          <a:ln/>
-        </p:spPr>
-        <p:txBody>
-          <a:bodyPr wrap="square" rtlCol="0" anchor="ctr"/>
-          <a:lstStyle/>
-          <a:p>
-            <a:pPr marL="0" indent="0">
-              <a:buNone/>
-            </a:pPr>
-            <a:r>
-              <a:rPr lang="en-US" sz="1300" dirty="0">
-                <a:solidFill>
-                  <a:srgbClr val="C8D8E8"/>
-                </a:solidFill>
-                <a:latin typeface="Calibri" pitchFamily="34" charset="0"/>
-                <a:ea typeface="Calibri" pitchFamily="34" charset="-122"/>
-                <a:cs typeface="Calibri" pitchFamily="34" charset="-120"/>
-              </a:rPr>
-              <a:t>Q21.10 tiene mayor precisión (×4 más bits fraccionarios), reduciendo el error en ~7x respecto a Q23.8.</a:t>
-            </a:r>
-            <a:endParaRPr lang="en-US" sz="1300" dirty="0"/>
-          </a:p>
-        </p:txBody>
-      </p:sp>
-      <p:sp>
-        <p:nvSpPr>
-          <p:cNvPr id="13" name="Shape 11"/>
-          <p:cNvSpPr/>
-          <p:nvPr/>
-        </p:nvSpPr>
-        <p:spPr>
-          <a:xfrm>
-            <a:off x="411480" y="3493008"/>
-            <a:ext cx="292608" cy="292608"/>
-          </a:xfrm>
-          <a:prstGeom prst="ellipse">
-            <a:avLst/>
-          </a:prstGeom>
-          <a:solidFill>
-            <a:srgbClr val="00B4D8"/>
-          </a:solidFill>
-          <a:ln w="12700">
-            <a:solidFill>
-              <a:srgbClr val="00B4D8"/>
-            </a:solidFill>
-            <a:prstDash val="solid"/>
-          </a:ln>
-        </p:spPr>
-      </p:sp>
-      <p:sp>
-        <p:nvSpPr>
-          <p:cNvPr id="14" name="Text 12"/>
-          <p:cNvSpPr/>
-          <p:nvPr/>
-        </p:nvSpPr>
-        <p:spPr>
-          <a:xfrm>
-            <a:off x="411480" y="3493008"/>
-            <a:ext cx="292608" cy="292608"/>
-          </a:xfrm>
-          <a:prstGeom prst="rect">
-            <a:avLst/>
-          </a:prstGeom>
-          <a:noFill/>
-          <a:ln/>
-        </p:spPr>
-        <p:txBody>
-          <a:bodyPr wrap="square" rtlCol="0" anchor="ctr"/>
-          <a:lstStyle/>
-          <a:p>
-            <a:pPr marL="0" indent="0" algn="ctr">
-              <a:buNone/>
-            </a:pPr>
-            <a:r>
-              <a:rPr lang="en-US" sz="1100" b="1" dirty="0">
-                <a:solidFill>
-                  <a:srgbClr val="FFFFFF"/>
-                </a:solidFill>
-              </a:rPr>
-              <a:t>4</a:t>
-            </a:r>
-            <a:endParaRPr lang="en-US" sz="1100" dirty="0"/>
-          </a:p>
-        </p:txBody>
-      </p:sp>
-      <p:sp>
-        <p:nvSpPr>
-          <p:cNvPr id="15" name="Text 13"/>
-          <p:cNvSpPr/>
-          <p:nvPr/>
-        </p:nvSpPr>
-        <p:spPr>
-          <a:xfrm>
-            <a:off x="868680" y="3438144"/>
-            <a:ext cx="7863840" cy="658368"/>
-          </a:xfrm>
-          <a:prstGeom prst="rect">
-            <a:avLst/>
-          </a:prstGeom>
-          <a:noFill/>
-          <a:ln/>
-        </p:spPr>
-        <p:txBody>
-          <a:bodyPr wrap="square" rtlCol="0" anchor="ctr"/>
-          <a:lstStyle/>
-          <a:p>
-            <a:pPr marL="0" indent="0">
-              <a:buNone/>
-            </a:pPr>
-            <a:r>
-              <a:rPr lang="en-US" sz="1300" dirty="0">
-                <a:solidFill>
-                  <a:srgbClr val="C8D8E8"/>
-                </a:solidFill>
-                <a:latin typeface="Calibri" pitchFamily="34" charset="0"/>
-                <a:ea typeface="Calibri" pitchFamily="34" charset="-122"/>
-                <a:cs typeface="Calibri" pitchFamily="34" charset="-120"/>
-              </a:rPr>
-              <a:t>Al aumentar n se gana precisión pero se reduce el rango dinámico representable.</a:t>
-            </a:r>
-            <a:endParaRPr lang="en-US" sz="1300" dirty="0"/>
-          </a:p>
-        </p:txBody>
-      </p:sp>
-      <p:sp>
-        <p:nvSpPr>
-          <p:cNvPr id="16" name="Shape 14"/>
-          <p:cNvSpPr/>
-          <p:nvPr/>
-        </p:nvSpPr>
-        <p:spPr>
-          <a:xfrm>
-            <a:off x="411480" y="4242816"/>
-            <a:ext cx="292608" cy="292608"/>
-          </a:xfrm>
-          <a:prstGeom prst="ellipse">
-            <a:avLst/>
-          </a:prstGeom>
-          <a:solidFill>
-            <a:srgbClr val="00B4D8"/>
-          </a:solidFill>
-          <a:ln w="12700">
-            <a:solidFill>
-              <a:srgbClr val="00B4D8"/>
-            </a:solidFill>
-            <a:prstDash val="solid"/>
-          </a:ln>
-        </p:spPr>
-      </p:sp>
-      <p:sp>
-        <p:nvSpPr>
-          <p:cNvPr id="17" name="Text 15"/>
-          <p:cNvSpPr/>
-          <p:nvPr/>
-        </p:nvSpPr>
-        <p:spPr>
-          <a:xfrm>
-            <a:off x="411480" y="4242816"/>
-            <a:ext cx="292608" cy="292608"/>
-          </a:xfrm>
-          <a:prstGeom prst="rect">
-            <a:avLst/>
-          </a:prstGeom>
-          <a:noFill/>
-          <a:ln/>
-        </p:spPr>
-        <p:txBody>
-          <a:bodyPr wrap="square" rtlCol="0" anchor="ctr"/>
-          <a:lstStyle/>
-          <a:p>
-            <a:pPr marL="0" indent="0" algn="ctr">
-              <a:buNone/>
-            </a:pPr>
-            <a:r>
-              <a:rPr lang="en-US" sz="1100" b="1" dirty="0">
-                <a:solidFill>
-                  <a:srgbClr val="FFFFFF"/>
-                </a:solidFill>
-              </a:rPr>
-              <a:t>5</a:t>
-            </a:r>
-            <a:endParaRPr lang="en-US" sz="1100" dirty="0"/>
-          </a:p>
-        </p:txBody>
-      </p:sp>
-      <p:sp>
-        <p:nvSpPr>
-          <p:cNvPr id="18" name="Text 16"/>
-          <p:cNvSpPr/>
-          <p:nvPr/>
-        </p:nvSpPr>
-        <p:spPr>
-          <a:xfrm>
-            <a:off x="868680" y="4187952"/>
-            <a:ext cx="7863840" cy="658368"/>
-          </a:xfrm>
-          <a:prstGeom prst="rect">
-            <a:avLst/>
-          </a:prstGeom>
-          <a:noFill/>
-          <a:ln/>
-        </p:spPr>
-        <p:txBody>
-          <a:bodyPr wrap="square" rtlCol="0" anchor="ctr"/>
-          <a:lstStyle/>
-          <a:p>
-            <a:pPr marL="0" indent="0">
-              <a:buNone/>
-            </a:pPr>
-            <a:r>
-              <a:rPr lang="en-US" sz="1300" dirty="0">
-                <a:solidFill>
-                  <a:srgbClr val="C8D8E8"/>
-                </a:solidFill>
-                <a:latin typeface="Calibri" pitchFamily="34" charset="0"/>
-                <a:ea typeface="Calibri" pitchFamily="34" charset="-122"/>
-                <a:cs typeface="Calibri" pitchFamily="34" charset="-120"/>
-              </a:rPr>
-              <a:t>Elegir el formato Q correcto es un balance entre precisión y rango según la aplicación DSP.</a:t>
+              <a:t> mejor que Q23.8 para representar 2.4515, con un error de sólo 0.000328.</a:t>
             </a:r>
             <a:endParaRPr lang="en-US" sz="1300" dirty="0"/>
           </a:p>
